--- a/EXP-1014-01/EXP-1014-01_앤트로픽-vs-미-국방부-공급망-위험-지정-재심-청구.pptx
+++ b/EXP-1014-01/EXP-1014-01_앤트로픽-vs-미-국방부-공급망-위험-지정-재심-청구.pptx
@@ -113,6 +113,133 @@
     </a:lvl9pPr>
   </p:defaultTextStyle>
 </p:presentation>
+</file>
+
+<file path=ppt/charts/chart1.xml><?xml version="1.0" encoding="utf-8"?>
+<c:chartSpace xmlns:c="http://schemas.openxmlformats.org/drawingml/2006/chart" xmlns:a="http://schemas.openxmlformats.org/drawingml/2006/main" xmlns:r="http://schemas.openxmlformats.org/officeDocument/2006/relationships">
+  <c:chart>
+    <c:autoTitleDeleted val="1"/>
+    <c:plotArea>
+      <c:pieChart>
+        <c:varyColors val="1"/>
+        <c:ser>
+          <c:idx val="0"/>
+          <c:order val="0"/>
+          <c:tx>
+            <c:strRef>
+              <c:f>Sheet1!$B$1</c:f>
+              <c:strCache>
+                <c:ptCount val="1"/>
+                <c:pt idx="0">
+                  <c:v>판사 수</c:v>
+                </c:pt>
+              </c:strCache>
+            </c:strRef>
+          </c:tx>
+          <c:dPt>
+            <c:idx val="0"/>
+            <c:spPr>
+              <a:solidFill>
+                <a:srgbClr val="3F5A3A"/>
+              </a:solidFill>
+            </c:spPr>
+          </c:dPt>
+          <c:dPt>
+            <c:idx val="1"/>
+            <c:spPr>
+              <a:solidFill>
+                <a:srgbClr val="D9971E"/>
+              </a:solidFill>
+            </c:spPr>
+          </c:dPt>
+          <c:cat>
+            <c:strRef>
+              <c:f>Sheet1!$A$2:$A$3</c:f>
+              <c:strCache>
+                <c:ptCount val="2"/>
+                <c:pt idx="0">
+                  <c:v>지정 적법 (국방부)</c:v>
+                </c:pt>
+                <c:pt idx="1">
+                  <c:v>반대 의견</c:v>
+                </c:pt>
+              </c:strCache>
+            </c:strRef>
+          </c:cat>
+          <c:val>
+            <c:numRef>
+              <c:f>Sheet1!$B$2:$B$3</c:f>
+              <c:numCache>
+                <c:formatCode>General</c:formatCode>
+                <c:ptCount val="2"/>
+                <c:pt idx="0">
+                  <c:v>2</c:v>
+                </c:pt>
+                <c:pt idx="1">
+                  <c:v>1</c:v>
+                </c:pt>
+              </c:numCache>
+            </c:numRef>
+          </c:val>
+        </c:ser>
+        <c:dLbls>
+          <c:txPr>
+            <a:bodyPr/>
+            <a:lstStyle/>
+            <a:p>
+              <a:pPr>
+                <a:defRPr sz="1100">
+                  <a:solidFill>
+                    <a:srgbClr val="17201A"/>
+                  </a:solidFill>
+                </a:defRPr>
+              </a:pPr>
+            </a:p>
+          </c:txPr>
+          <c:showLegendKey val="0"/>
+          <c:showVal val="0"/>
+          <c:showCatName val="0"/>
+          <c:showSerName val="0"/>
+          <c:showPercent val="1"/>
+          <c:showBubbleSize val="0"/>
+          <c:showLeaderLines val="1"/>
+        </c:dLbls>
+      </c:pieChart>
+    </c:plotArea>
+    <c:legend>
+      <c:legendPos val="b"/>
+      <c:overlay val="0"/>
+      <c:txPr>
+        <a:bodyPr/>
+        <a:lstStyle/>
+        <a:p>
+          <a:pPr>
+            <a:defRPr sz="1100"/>
+          </a:pPr>
+        </a:p>
+      </c:txPr>
+    </c:legend>
+    <c:dispBlanksAs val="gap"/>
+  </c:chart>
+  <c:txPr>
+    <a:bodyPr/>
+    <a:lstStyle/>
+    <a:p>
+      <a:pPr>
+        <a:defRPr sz="1100">
+          <a:solidFill>
+            <a:srgbClr val="2C362F"/>
+          </a:solidFill>
+          <a:latin typeface="Noto Sans KR"/>
+        </a:defRPr>
+      </a:pPr>
+      <a:endParaRPr lang="en-US"/>
+    </a:p>
+  </c:txPr>
+  <c:externalData r:id="rId1">
+    <c:autoUpdate val="0"/>
+  </c:externalData>
+</c:chartSpace>
 </file>
 
 <file path=ppt/slideLayouts/slideLayout1.xml><?xml version="1.0" encoding="utf-8"?>
@@ -4308,7 +4435,7 @@
         <p:spPr>
           <a:xfrm>
             <a:off x="482600" y="1270000"/>
-            <a:ext cx="11226800" cy="19050"/>
+            <a:ext cx="4445000" cy="19050"/>
           </a:xfrm>
           <a:prstGeom prst="rect">
             <a:avLst/>
@@ -4352,7 +4479,7 @@
         <p:spPr>
           <a:xfrm>
             <a:off x="482600" y="1409699"/>
-            <a:ext cx="11226800" cy="4000500"/>
+            <a:ext cx="4445000" cy="4229100"/>
           </a:xfrm>
           <a:prstGeom prst="rect">
             <a:avLst/>
@@ -4365,128 +4492,257 @@
           </a:bodyPr>
           <a:lstStyle/>
           <a:p>
+            <a:pPr marL="165100" indent="-165100">
+              <a:lnSpc>
+                <a:spcPct val="140000"/>
+              </a:lnSpc>
+              <a:spcAft>
+                <a:spcPts val="700"/>
+              </a:spcAft>
+            </a:pPr>
+            <a:r>
+              <a:rPr sz="800" b="0">
+                <a:solidFill>
+                  <a:srgbClr val="3F5A3A"/>
+                </a:solidFill>
+                <a:latin typeface="Noto Sans KR"/>
+              </a:rPr>
+              <a:t>■   </a:t>
+            </a:r>
+            <a:r>
+              <a:rPr sz="1400" b="0">
+                <a:solidFill>
+                  <a:srgbClr val="2C362F"/>
+                </a:solidFill>
+                <a:latin typeface="Noto Sans KR"/>
+              </a:rPr>
+              <a:t>국방부가 3월에 앤트로픽을 '공급망 위험'으로 지정</a:t>
+            </a:r>
+          </a:p>
+          <a:p>
+            <a:pPr marL="165100" indent="-165100">
+              <a:lnSpc>
+                <a:spcPct val="140000"/>
+              </a:lnSpc>
+              <a:spcAft>
+                <a:spcPts val="700"/>
+              </a:spcAft>
+            </a:pPr>
+            <a:r>
+              <a:rPr sz="800" b="0">
+                <a:solidFill>
+                  <a:srgbClr val="3F5A3A"/>
+                </a:solidFill>
+                <a:latin typeface="Noto Sans KR"/>
+              </a:rPr>
+              <a:t>■   </a:t>
+            </a:r>
+            <a:r>
+              <a:rPr sz="1400" b="0">
+                <a:solidFill>
+                  <a:srgbClr val="2C362F"/>
+                </a:solidFill>
+                <a:latin typeface="Noto Sans KR"/>
+              </a:rPr>
+              <a:t>9월 25일 항소법원 3인 재판부가 2대 1로 국방부</a:t>
+            </a:r>
+            <a:br/>
+            <a:r>
+              <a:rPr sz="1400" b="0">
+                <a:solidFill>
+                  <a:srgbClr val="2C362F"/>
+                </a:solidFill>
+                <a:latin typeface="Noto Sans KR"/>
+              </a:rPr>
+              <a:t>손을 들어줌</a:t>
+            </a:r>
+          </a:p>
+          <a:p>
+            <a:pPr marL="165100" indent="-165100">
+              <a:lnSpc>
+                <a:spcPct val="140000"/>
+              </a:lnSpc>
+              <a:spcAft>
+                <a:spcPts val="700"/>
+              </a:spcAft>
+            </a:pPr>
+            <a:r>
+              <a:rPr sz="800" b="0">
+                <a:solidFill>
+                  <a:srgbClr val="3F5A3A"/>
+                </a:solidFill>
+                <a:latin typeface="Noto Sans KR"/>
+              </a:rPr>
+              <a:t>■   </a:t>
+            </a:r>
+            <a:r>
+              <a:rPr sz="1400" b="0">
+                <a:solidFill>
+                  <a:srgbClr val="2C362F"/>
+                </a:solidFill>
+                <a:latin typeface="Noto Sans KR"/>
+              </a:rPr>
+              <a:t>앤트로픽은 법원 전체가 다시 심리해 달라고 청원</a:t>
+            </a:r>
+          </a:p>
+          <a:p>
+            <a:pPr marL="165100" indent="-165100">
+              <a:lnSpc>
+                <a:spcPct val="140000"/>
+              </a:lnSpc>
+              <a:spcAft>
+                <a:spcPts val="700"/>
+              </a:spcAft>
+            </a:pPr>
+            <a:r>
+              <a:rPr sz="800" b="0">
+                <a:solidFill>
+                  <a:srgbClr val="3F5A3A"/>
+                </a:solidFill>
+                <a:latin typeface="Noto Sans KR"/>
+              </a:rPr>
+              <a:t>■   </a:t>
+            </a:r>
+            <a:r>
+              <a:rPr sz="1400" b="0">
+                <a:solidFill>
+                  <a:srgbClr val="2C362F"/>
+                </a:solidFill>
+                <a:latin typeface="Noto Sans KR"/>
+              </a:rPr>
+              <a:t>재심을 받아들일지, 언제 결정할지는 아직 알려지지</a:t>
+            </a:r>
+            <a:br/>
+            <a:r>
+              <a:rPr sz="1400" b="0">
+                <a:solidFill>
+                  <a:srgbClr val="2C362F"/>
+                </a:solidFill>
+                <a:latin typeface="Noto Sans KR"/>
+              </a:rPr>
+              <a:t>않음</a:t>
+            </a:r>
+          </a:p>
+        </p:txBody>
+      </p:sp>
+      <p:pic>
+        <p:nvPicPr>
+          <p:cNvPr id="8" name="Picture 7" descr="article.jpg"/>
+          <p:cNvPicPr>
+            <a:picLocks noChangeAspect="1"/>
+          </p:cNvPicPr>
+          <p:nvPr/>
+        </p:nvPicPr>
+        <p:blipFill>
+          <a:blip r:embed="rId2"/>
+          <a:srcRect l="1071" r="1071"/>
+          <a:stretch>
+            <a:fillRect/>
+          </a:stretch>
+        </p:blipFill>
+        <p:spPr>
+          <a:xfrm>
+            <a:off x="5181599" y="1270000"/>
+            <a:ext cx="6527800" cy="3962399"/>
+          </a:xfrm>
+          <a:prstGeom prst="rect">
+            <a:avLst/>
+          </a:prstGeom>
+        </p:spPr>
+      </p:pic>
+      <p:sp>
+        <p:nvSpPr>
+          <p:cNvPr id="9" name="TextBox 8"/>
+          <p:cNvSpPr txBox="1"/>
+          <p:nvPr/>
+        </p:nvSpPr>
+        <p:spPr>
+          <a:xfrm>
+            <a:off x="5181599" y="5295899"/>
+            <a:ext cx="6527800" cy="215900"/>
+          </a:xfrm>
+          <a:prstGeom prst="rect">
+            <a:avLst/>
+          </a:prstGeom>
+          <a:noFill/>
+        </p:spPr>
+        <p:txBody>
+          <a:bodyPr wrap="square" lIns="0" rIns="0" tIns="0" bIns="0">
+            <a:spAutoFit/>
+          </a:bodyPr>
+          <a:lstStyle/>
+          <a:p>
             <a:pPr>
               <a:lnSpc>
-                <a:spcPct val="140000"/>
-              </a:lnSpc>
-              <a:spcAft>
-                <a:spcPts val="700"/>
+                <a:spcPct val="130000"/>
+              </a:lnSpc>
+              <a:spcAft>
+                <a:spcPts val="0"/>
+              </a:spcAft>
+            </a:pPr>
+            <a:r>
+              <a:rPr sz="850" b="0">
+                <a:solidFill>
+                  <a:srgbClr val="5C685F"/>
+                </a:solidFill>
+                <a:latin typeface="Noto Sans KR"/>
+              </a:rPr>
+              <a:t>본 사진은 앤트로픽의 AI '클로드' 화면과 미국 전쟁부(국방부) 문장을 나란히 놓은 모습입니다</a:t>
+            </a:r>
+          </a:p>
+        </p:txBody>
+      </p:sp>
+      <p:sp>
+        <p:nvSpPr>
+          <p:cNvPr id="10" name="TextBox 9"/>
+          <p:cNvSpPr txBox="1"/>
+          <p:nvPr/>
+        </p:nvSpPr>
+        <p:spPr>
+          <a:xfrm>
+            <a:off x="5181599" y="5511800"/>
+            <a:ext cx="6527800" cy="177799"/>
+          </a:xfrm>
+          <a:prstGeom prst="rect">
+            <a:avLst/>
+          </a:prstGeom>
+          <a:noFill/>
+        </p:spPr>
+        <p:txBody>
+          <a:bodyPr wrap="square" lIns="0" rIns="0" tIns="0" bIns="0">
+            <a:spAutoFit/>
+          </a:bodyPr>
+          <a:lstStyle/>
+          <a:p>
+            <a:pPr>
+              <a:lnSpc>
+                <a:spcPct val="130000"/>
+              </a:lnSpc>
+              <a:spcAft>
+                <a:spcPts val="0"/>
               </a:spcAft>
             </a:pPr>
             <a:r>
               <a:rPr sz="800" b="0">
                 <a:solidFill>
-                  <a:srgbClr val="3F5A3A"/>
-                </a:solidFill>
-                <a:latin typeface="Noto Sans KR"/>
-              </a:rPr>
-              <a:t>■   </a:t>
-            </a:r>
-            <a:r>
-              <a:rPr sz="1400" b="0">
-                <a:solidFill>
-                  <a:srgbClr val="2C362F"/>
-                </a:solidFill>
-                <a:latin typeface="Noto Sans KR"/>
-              </a:rPr>
-              <a:t>국방부가 3월에 앤트로픽을 '공급망 위험'으로 지정</a:t>
-            </a:r>
-          </a:p>
-          <a:p>
-            <a:pPr>
-              <a:lnSpc>
-                <a:spcPct val="140000"/>
-              </a:lnSpc>
-              <a:spcAft>
-                <a:spcPts val="700"/>
-              </a:spcAft>
-            </a:pPr>
-            <a:r>
-              <a:rPr sz="800" b="0">
-                <a:solidFill>
-                  <a:srgbClr val="3F5A3A"/>
-                </a:solidFill>
-                <a:latin typeface="Noto Sans KR"/>
-              </a:rPr>
-              <a:t>■   </a:t>
-            </a:r>
-            <a:r>
-              <a:rPr sz="1400" b="0">
-                <a:solidFill>
-                  <a:srgbClr val="2C362F"/>
-                </a:solidFill>
-                <a:latin typeface="Noto Sans KR"/>
-              </a:rPr>
-              <a:t>9월 25일 항소법원 3인 재판부가 2대 1로 국방부 손을 들어줌</a:t>
-            </a:r>
-          </a:p>
-          <a:p>
-            <a:pPr>
-              <a:lnSpc>
-                <a:spcPct val="140000"/>
-              </a:lnSpc>
-              <a:spcAft>
-                <a:spcPts val="700"/>
-              </a:spcAft>
-            </a:pPr>
-            <a:r>
-              <a:rPr sz="800" b="0">
-                <a:solidFill>
-                  <a:srgbClr val="3F5A3A"/>
-                </a:solidFill>
-                <a:latin typeface="Noto Sans KR"/>
-              </a:rPr>
-              <a:t>■   </a:t>
-            </a:r>
-            <a:r>
-              <a:rPr sz="1400" b="0">
-                <a:solidFill>
-                  <a:srgbClr val="2C362F"/>
-                </a:solidFill>
-                <a:latin typeface="Noto Sans KR"/>
-              </a:rPr>
-              <a:t>앤트로픽은 법원 전체가 다시 심리해 달라고 청원</a:t>
-            </a:r>
-          </a:p>
-          <a:p>
-            <a:pPr>
-              <a:lnSpc>
-                <a:spcPct val="140000"/>
-              </a:lnSpc>
-              <a:spcAft>
-                <a:spcPts val="700"/>
-              </a:spcAft>
-            </a:pPr>
-            <a:r>
-              <a:rPr sz="800" b="0">
-                <a:solidFill>
-                  <a:srgbClr val="3F5A3A"/>
-                </a:solidFill>
-                <a:latin typeface="Noto Sans KR"/>
-              </a:rPr>
-              <a:t>■   </a:t>
-            </a:r>
-            <a:r>
-              <a:rPr sz="1400" b="0">
-                <a:solidFill>
-                  <a:srgbClr val="2C362F"/>
-                </a:solidFill>
-                <a:latin typeface="Noto Sans KR"/>
-              </a:rPr>
-              <a:t>재심을 받아들일지, 언제 결정할지는 아직 알려지지 않음</a:t>
-            </a:r>
-          </a:p>
-        </p:txBody>
-      </p:sp>
-      <p:sp>
-        <p:nvSpPr>
-          <p:cNvPr id="8" name="Rounded Rectangle 7"/>
+                  <a:srgbClr val="7D897F"/>
+                </a:solidFill>
+                <a:latin typeface="Noto Sans KR"/>
+              </a:rPr>
+              <a:t>출처: AI타임스 기사 대표 사진</a:t>
+            </a:r>
+          </a:p>
+        </p:txBody>
+      </p:sp>
+      <p:sp>
+        <p:nvSpPr>
+          <p:cNvPr id="11" name="Rounded Rectangle 10"/>
           <p:cNvSpPr/>
           <p:nvPr/>
         </p:nvSpPr>
         <p:spPr>
           <a:xfrm>
-            <a:off x="482600" y="5588000"/>
+            <a:off x="482600" y="5816600"/>
             <a:ext cx="11226800" cy="533399"/>
           </a:xfrm>
           <a:prstGeom prst="roundRect">
@@ -4526,13 +4782,13 @@
       </p:sp>
       <p:sp>
         <p:nvSpPr>
-          <p:cNvPr id="9" name="TextBox 8"/>
+          <p:cNvPr id="12" name="TextBox 11"/>
           <p:cNvSpPr txBox="1"/>
           <p:nvPr/>
         </p:nvSpPr>
         <p:spPr>
           <a:xfrm>
-            <a:off x="685800" y="5588000"/>
+            <a:off x="685800" y="5816600"/>
             <a:ext cx="10795000" cy="533399"/>
           </a:xfrm>
           <a:prstGeom prst="rect">
@@ -4571,48 +4827,6 @@
                 <a:latin typeface="Noto Sans KR"/>
               </a:rPr>
               <a:t>1심 격인 3인 재판부 판단을 법원 전체가 다시 볼지가 다음 고비입니다</a:t>
-            </a:r>
-          </a:p>
-        </p:txBody>
-      </p:sp>
-      <p:sp>
-        <p:nvSpPr>
-          <p:cNvPr id="10" name="TextBox 9"/>
-          <p:cNvSpPr txBox="1"/>
-          <p:nvPr/>
-        </p:nvSpPr>
-        <p:spPr>
-          <a:xfrm>
-            <a:off x="482600" y="6197600"/>
-            <a:ext cx="11226800" cy="190499"/>
-          </a:xfrm>
-          <a:prstGeom prst="rect">
-            <a:avLst/>
-          </a:prstGeom>
-          <a:noFill/>
-        </p:spPr>
-        <p:txBody>
-          <a:bodyPr wrap="square" lIns="0" rIns="0" tIns="0" bIns="0">
-            <a:spAutoFit/>
-          </a:bodyPr>
-          <a:lstStyle/>
-          <a:p>
-            <a:pPr>
-              <a:lnSpc>
-                <a:spcPct val="130000"/>
-              </a:lnSpc>
-              <a:spcAft>
-                <a:spcPts val="0"/>
-              </a:spcAft>
-            </a:pPr>
-            <a:r>
-              <a:rPr sz="800" b="0">
-                <a:solidFill>
-                  <a:srgbClr val="7D897F"/>
-                </a:solidFill>
-                <a:latin typeface="Noto Sans KR"/>
-              </a:rPr>
-              <a:t>출처: AI타임스 2026-10-14 (US News 같은 소식)</a:t>
             </a:r>
           </a:p>
         </p:txBody>
@@ -4869,7 +5083,7 @@
           </a:bodyPr>
           <a:lstStyle/>
           <a:p>
-            <a:pPr>
+            <a:pPr marL="165100" indent="-165100">
               <a:lnSpc>
                 <a:spcPct val="140000"/>
               </a:lnSpc>
@@ -4897,7 +5111,7 @@
             </a:r>
           </a:p>
           <a:p>
-            <a:pPr>
+            <a:pPr marL="165100" indent="-165100">
               <a:lnSpc>
                 <a:spcPct val="140000"/>
               </a:lnSpc>
@@ -4925,7 +5139,7 @@
             </a:r>
           </a:p>
           <a:p>
-            <a:pPr>
+            <a:pPr marL="165100" indent="-165100">
               <a:lnSpc>
                 <a:spcPct val="140000"/>
               </a:lnSpc>
@@ -4953,7 +5167,7 @@
             </a:r>
           </a:p>
           <a:p>
-            <a:pPr>
+            <a:pPr marL="165100" indent="-165100">
               <a:lnSpc>
                 <a:spcPct val="140000"/>
               </a:lnSpc>
@@ -5276,7 +5490,7 @@
           </a:bodyPr>
           <a:lstStyle/>
           <a:p>
-            <a:pPr>
+            <a:pPr marL="165100" indent="-165100">
               <a:lnSpc>
                 <a:spcPct val="140000"/>
               </a:lnSpc>
@@ -5304,7 +5518,7 @@
             </a:r>
           </a:p>
           <a:p>
-            <a:pPr>
+            <a:pPr marL="165100" indent="-165100">
               <a:lnSpc>
                 <a:spcPct val="140000"/>
               </a:lnSpc>
@@ -5332,7 +5546,7 @@
             </a:r>
           </a:p>
           <a:p>
-            <a:pPr>
+            <a:pPr marL="165100" indent="-165100">
               <a:lnSpc>
                 <a:spcPct val="140000"/>
               </a:lnSpc>
@@ -5360,7 +5574,7 @@
             </a:r>
           </a:p>
           <a:p>
-            <a:pPr>
+            <a:pPr marL="165100" indent="-165100">
               <a:lnSpc>
                 <a:spcPct val="140000"/>
               </a:lnSpc>
@@ -5388,7 +5602,7 @@
             </a:r>
           </a:p>
           <a:p>
-            <a:pPr>
+            <a:pPr marL="165100" indent="-165100">
               <a:lnSpc>
                 <a:spcPct val="140000"/>
               </a:lnSpc>
@@ -5416,7 +5630,7 @@
             </a:r>
           </a:p>
           <a:p>
-            <a:pPr>
+            <a:pPr marL="165100" indent="-165100">
               <a:lnSpc>
                 <a:spcPct val="140000"/>
               </a:lnSpc>
@@ -5640,7 +5854,7 @@
         <p:spPr>
           <a:xfrm>
             <a:off x="482600" y="1270000"/>
-            <a:ext cx="11226800" cy="19050"/>
+            <a:ext cx="4445000" cy="19050"/>
           </a:xfrm>
           <a:prstGeom prst="rect">
             <a:avLst/>
@@ -5684,7 +5898,7 @@
         <p:spPr>
           <a:xfrm>
             <a:off x="482600" y="1409699"/>
-            <a:ext cx="11226800" cy="4229100"/>
+            <a:ext cx="4445000" cy="4229100"/>
           </a:xfrm>
           <a:prstGeom prst="rect">
             <a:avLst/>
@@ -5697,122 +5911,264 @@
           </a:bodyPr>
           <a:lstStyle/>
           <a:p>
+            <a:pPr marL="165100" indent="-165100">
+              <a:lnSpc>
+                <a:spcPct val="140000"/>
+              </a:lnSpc>
+              <a:spcAft>
+                <a:spcPts val="700"/>
+              </a:spcAft>
+            </a:pPr>
+            <a:r>
+              <a:rPr sz="800" b="0">
+                <a:solidFill>
+                  <a:srgbClr val="3F5A3A"/>
+                </a:solidFill>
+                <a:latin typeface="Noto Sans KR"/>
+              </a:rPr>
+              <a:t>■   </a:t>
+            </a:r>
+            <a:r>
+              <a:rPr sz="1400" b="0">
+                <a:solidFill>
+                  <a:srgbClr val="2C362F"/>
+                </a:solidFill>
+                <a:latin typeface="Noto Sans KR"/>
+              </a:rPr>
+              <a:t>앤트로픽: AI 안전 원칙을 밝힌 회사에 대한 보복성</a:t>
+            </a:r>
+            <a:br/>
+            <a:r>
+              <a:rPr sz="1400" b="0">
+                <a:solidFill>
+                  <a:srgbClr val="2C362F"/>
+                </a:solidFill>
+                <a:latin typeface="Noto Sans KR"/>
+              </a:rPr>
+              <a:t>제재</a:t>
+            </a:r>
+          </a:p>
+          <a:p>
+            <a:pPr marL="165100" indent="-165100">
+              <a:lnSpc>
+                <a:spcPct val="140000"/>
+              </a:lnSpc>
+              <a:spcAft>
+                <a:spcPts val="700"/>
+              </a:spcAft>
+            </a:pPr>
+            <a:r>
+              <a:rPr sz="800" b="0">
+                <a:solidFill>
+                  <a:srgbClr val="3F5A3A"/>
+                </a:solidFill>
+                <a:latin typeface="Noto Sans KR"/>
+              </a:rPr>
+              <a:t>■   </a:t>
+            </a:r>
+            <a:r>
+              <a:rPr sz="1400" b="0">
+                <a:solidFill>
+                  <a:srgbClr val="2C362F"/>
+                </a:solidFill>
+                <a:latin typeface="Noto Sans KR"/>
+              </a:rPr>
+              <a:t>앤트로픽: 사전 절차 없이 지정, 관련 법도 잘못</a:t>
+            </a:r>
+            <a:br/>
+            <a:r>
+              <a:rPr sz="1400" b="0">
+                <a:solidFill>
+                  <a:srgbClr val="2C362F"/>
+                </a:solidFill>
+                <a:latin typeface="Noto Sans KR"/>
+              </a:rPr>
+              <a:t>해석</a:t>
+            </a:r>
+          </a:p>
+          <a:p>
+            <a:pPr marL="165100" indent="-165100">
+              <a:lnSpc>
+                <a:spcPct val="140000"/>
+              </a:lnSpc>
+              <a:spcAft>
+                <a:spcPts val="700"/>
+              </a:spcAft>
+            </a:pPr>
+            <a:r>
+              <a:rPr sz="800" b="0">
+                <a:solidFill>
+                  <a:srgbClr val="3F5A3A"/>
+                </a:solidFill>
+                <a:latin typeface="Noto Sans KR"/>
+              </a:rPr>
+              <a:t>■   </a:t>
+            </a:r>
+            <a:r>
+              <a:rPr sz="1400" b="0">
+                <a:solidFill>
+                  <a:srgbClr val="2C362F"/>
+                </a:solidFill>
+                <a:latin typeface="Noto Sans KR"/>
+              </a:rPr>
+              <a:t>국방부(다수 의견): 클로드 설계를 바꿔 안보 임무를</a:t>
+            </a:r>
+            <a:br/>
+            <a:r>
+              <a:rPr sz="1400" b="0">
+                <a:solidFill>
+                  <a:srgbClr val="2C362F"/>
+                </a:solidFill>
+                <a:latin typeface="Noto Sans KR"/>
+              </a:rPr>
+              <a:t>방해할 수 있다는 우려는 합리적</a:t>
+            </a:r>
+          </a:p>
+          <a:p>
+            <a:pPr marL="165100" indent="-165100">
+              <a:lnSpc>
+                <a:spcPct val="140000"/>
+              </a:lnSpc>
+              <a:spcAft>
+                <a:spcPts val="700"/>
+              </a:spcAft>
+            </a:pPr>
+            <a:r>
+              <a:rPr sz="800" b="0">
+                <a:solidFill>
+                  <a:srgbClr val="3F5A3A"/>
+                </a:solidFill>
+                <a:latin typeface="Noto Sans KR"/>
+              </a:rPr>
+              <a:t>■   </a:t>
+            </a:r>
+            <a:r>
+              <a:rPr sz="1400" b="0">
+                <a:solidFill>
+                  <a:srgbClr val="2C362F"/>
+                </a:solidFill>
+                <a:latin typeface="Noto Sans KR"/>
+              </a:rPr>
+              <a:t>판단 근거는 '모델 공급자가 사용 조건을 바꿀 수</a:t>
+            </a:r>
+            <a:br/>
+            <a:r>
+              <a:rPr sz="1400" b="0">
+                <a:solidFill>
+                  <a:srgbClr val="2C362F"/>
+                </a:solidFill>
+                <a:latin typeface="Noto Sans KR"/>
+              </a:rPr>
+              <a:t>있다'는 점</a:t>
+            </a:r>
+          </a:p>
+        </p:txBody>
+      </p:sp>
+      <p:sp>
+        <p:nvSpPr>
+          <p:cNvPr id="8" name="TextBox 7"/>
+          <p:cNvSpPr txBox="1"/>
+          <p:nvPr/>
+        </p:nvSpPr>
+        <p:spPr>
+          <a:xfrm>
+            <a:off x="5181599" y="1270000"/>
+            <a:ext cx="6527800" cy="254000"/>
+          </a:xfrm>
+          <a:prstGeom prst="rect">
+            <a:avLst/>
+          </a:prstGeom>
+          <a:noFill/>
+        </p:spPr>
+        <p:txBody>
+          <a:bodyPr wrap="square" lIns="0" rIns="0" tIns="0" bIns="0">
+            <a:spAutoFit/>
+          </a:bodyPr>
+          <a:lstStyle/>
+          <a:p>
             <a:pPr>
               <a:lnSpc>
-                <a:spcPct val="140000"/>
-              </a:lnSpc>
-              <a:spcAft>
-                <a:spcPts val="700"/>
+                <a:spcPct val="130000"/>
+              </a:lnSpc>
+              <a:spcAft>
+                <a:spcPts val="0"/>
+              </a:spcAft>
+            </a:pPr>
+            <a:r>
+              <a:rPr sz="1200" b="1">
+                <a:solidFill>
+                  <a:srgbClr val="17201A"/>
+                </a:solidFill>
+                <a:latin typeface="Noto Sans KR"/>
+              </a:rPr>
+              <a:t>D.C. 항소법원 3인 재판부 판단 (명)</a:t>
+            </a:r>
+          </a:p>
+        </p:txBody>
+      </p:sp>
+      <p:graphicFrame>
+        <p:nvGraphicFramePr>
+          <p:cNvPr id="9" name="Chart 8"/>
+          <p:cNvGraphicFramePr>
+            <a:graphicFrameLocks noGrp="1"/>
+          </p:cNvGraphicFramePr>
+          <p:nvPr/>
+        </p:nvGraphicFramePr>
+        <p:xfrm>
+          <a:off x="5181599" y="1562100"/>
+          <a:ext cx="6527800" cy="3886200"/>
+        </p:xfrm>
+        <a:graphic>
+          <a:graphicData uri="http://schemas.openxmlformats.org/drawingml/2006/chart">
+            <c:chart xmlns:c="http://schemas.openxmlformats.org/drawingml/2006/chart" r:id="rId2"/>
+          </a:graphicData>
+        </a:graphic>
+      </p:graphicFrame>
+      <p:sp>
+        <p:nvSpPr>
+          <p:cNvPr id="10" name="TextBox 9"/>
+          <p:cNvSpPr txBox="1"/>
+          <p:nvPr/>
+        </p:nvSpPr>
+        <p:spPr>
+          <a:xfrm>
+            <a:off x="5181599" y="5511800"/>
+            <a:ext cx="6527800" cy="177799"/>
+          </a:xfrm>
+          <a:prstGeom prst="rect">
+            <a:avLst/>
+          </a:prstGeom>
+          <a:noFill/>
+        </p:spPr>
+        <p:txBody>
+          <a:bodyPr wrap="square" lIns="0" rIns="0" tIns="0" bIns="0">
+            <a:spAutoFit/>
+          </a:bodyPr>
+          <a:lstStyle/>
+          <a:p>
+            <a:pPr>
+              <a:lnSpc>
+                <a:spcPct val="130000"/>
+              </a:lnSpc>
+              <a:spcAft>
+                <a:spcPts val="0"/>
               </a:spcAft>
             </a:pPr>
             <a:r>
               <a:rPr sz="800" b="0">
                 <a:solidFill>
-                  <a:srgbClr val="3F5A3A"/>
-                </a:solidFill>
-                <a:latin typeface="Noto Sans KR"/>
-              </a:rPr>
-              <a:t>■   </a:t>
-            </a:r>
-            <a:r>
-              <a:rPr sz="1400" b="0">
-                <a:solidFill>
-                  <a:srgbClr val="2C362F"/>
-                </a:solidFill>
-                <a:latin typeface="Noto Sans KR"/>
-              </a:rPr>
-              <a:t>앤트로픽: AI 안전 원칙을 밝힌 회사에 대한 보복성 제재</a:t>
-            </a:r>
-          </a:p>
-          <a:p>
-            <a:pPr>
-              <a:lnSpc>
-                <a:spcPct val="140000"/>
-              </a:lnSpc>
-              <a:spcAft>
-                <a:spcPts val="700"/>
-              </a:spcAft>
-            </a:pPr>
-            <a:r>
-              <a:rPr sz="800" b="0">
-                <a:solidFill>
-                  <a:srgbClr val="3F5A3A"/>
-                </a:solidFill>
-                <a:latin typeface="Noto Sans KR"/>
-              </a:rPr>
-              <a:t>■   </a:t>
-            </a:r>
-            <a:r>
-              <a:rPr sz="1400" b="0">
-                <a:solidFill>
-                  <a:srgbClr val="2C362F"/>
-                </a:solidFill>
-                <a:latin typeface="Noto Sans KR"/>
-              </a:rPr>
-              <a:t>앤트로픽: 사전 절차 없이 지정, 관련 법도 잘못 해석</a:t>
-            </a:r>
-          </a:p>
-          <a:p>
-            <a:pPr>
-              <a:lnSpc>
-                <a:spcPct val="140000"/>
-              </a:lnSpc>
-              <a:spcAft>
-                <a:spcPts val="700"/>
-              </a:spcAft>
-            </a:pPr>
-            <a:r>
-              <a:rPr sz="800" b="0">
-                <a:solidFill>
-                  <a:srgbClr val="3F5A3A"/>
-                </a:solidFill>
-                <a:latin typeface="Noto Sans KR"/>
-              </a:rPr>
-              <a:t>■   </a:t>
-            </a:r>
-            <a:r>
-              <a:rPr sz="1400" b="0">
-                <a:solidFill>
-                  <a:srgbClr val="2C362F"/>
-                </a:solidFill>
-                <a:latin typeface="Noto Sans KR"/>
-              </a:rPr>
-              <a:t>국방부(다수 의견): 클로드 설계를 바꿔 안보 임무를 방해할 수 있다는 우려는 합리적</a:t>
-            </a:r>
-          </a:p>
-          <a:p>
-            <a:pPr>
-              <a:lnSpc>
-                <a:spcPct val="140000"/>
-              </a:lnSpc>
-              <a:spcAft>
-                <a:spcPts val="700"/>
-              </a:spcAft>
-            </a:pPr>
-            <a:r>
-              <a:rPr sz="800" b="0">
-                <a:solidFill>
-                  <a:srgbClr val="3F5A3A"/>
-                </a:solidFill>
-                <a:latin typeface="Noto Sans KR"/>
-              </a:rPr>
-              <a:t>■   </a:t>
-            </a:r>
-            <a:r>
-              <a:rPr sz="1400" b="0">
-                <a:solidFill>
-                  <a:srgbClr val="2C362F"/>
-                </a:solidFill>
-                <a:latin typeface="Noto Sans KR"/>
-              </a:rPr>
-              <a:t>판단 근거는 '모델 공급자가 사용 조건을 바꿀 수 있다'는 점</a:t>
-            </a:r>
-          </a:p>
-        </p:txBody>
-      </p:sp>
-      <p:sp>
-        <p:nvSpPr>
-          <p:cNvPr id="8" name="Rounded Rectangle 7"/>
+                  <a:srgbClr val="7D897F"/>
+                </a:solidFill>
+                <a:latin typeface="Noto Sans KR"/>
+              </a:rPr>
+              <a:t>출처: AI타임스 2026-10-14</a:t>
+            </a:r>
+          </a:p>
+        </p:txBody>
+      </p:sp>
+      <p:sp>
+        <p:nvSpPr>
+          <p:cNvPr id="11" name="Rounded Rectangle 10"/>
           <p:cNvSpPr/>
           <p:nvPr/>
         </p:nvSpPr>
@@ -5858,7 +6214,7 @@
       </p:sp>
       <p:sp>
         <p:nvSpPr>
-          <p:cNvPr id="9" name="TextBox 8"/>
+          <p:cNvPr id="12" name="TextBox 11"/>
           <p:cNvSpPr txBox="1"/>
           <p:nvPr/>
         </p:nvSpPr>
@@ -6102,7 +6458,7 @@
         <p:spPr>
           <a:xfrm>
             <a:off x="482600" y="1270000"/>
-            <a:ext cx="11226800" cy="19050"/>
+            <a:ext cx="4445000" cy="19050"/>
           </a:xfrm>
           <a:prstGeom prst="rect">
             <a:avLst/>
@@ -6146,7 +6502,7 @@
         <p:spPr>
           <a:xfrm>
             <a:off x="482600" y="1409699"/>
-            <a:ext cx="11226800" cy="4889500"/>
+            <a:ext cx="4445000" cy="4889500"/>
           </a:xfrm>
           <a:prstGeom prst="rect">
             <a:avLst/>
@@ -6159,115 +6515,337 @@
           </a:bodyPr>
           <a:lstStyle/>
           <a:p>
+            <a:pPr marL="165100" indent="-165100">
+              <a:lnSpc>
+                <a:spcPct val="140000"/>
+              </a:lnSpc>
+              <a:spcAft>
+                <a:spcPts val="700"/>
+              </a:spcAft>
+            </a:pPr>
+            <a:r>
+              <a:rPr sz="800" b="0">
+                <a:solidFill>
+                  <a:srgbClr val="3F5A3A"/>
+                </a:solidFill>
+                <a:latin typeface="Noto Sans KR"/>
+              </a:rPr>
+              <a:t>■   </a:t>
+            </a:r>
+            <a:r>
+              <a:rPr sz="1400" b="0">
+                <a:solidFill>
+                  <a:srgbClr val="2C362F"/>
+                </a:solidFill>
+                <a:latin typeface="Noto Sans KR"/>
+              </a:rPr>
+              <a:t>국방 과제에 외부 상용 AI 모델을 쓰면 공급사</a:t>
+            </a:r>
+            <a:br/>
+            <a:r>
+              <a:rPr sz="1400" b="0">
+                <a:solidFill>
+                  <a:srgbClr val="2C362F"/>
+                </a:solidFill>
+                <a:latin typeface="Noto Sans KR"/>
+              </a:rPr>
+              <a:t>정책·지정이 곧 사업 위험</a:t>
+            </a:r>
+          </a:p>
+          <a:p>
+            <a:pPr marL="165100" indent="-165100">
+              <a:lnSpc>
+                <a:spcPct val="140000"/>
+              </a:lnSpc>
+              <a:spcAft>
+                <a:spcPts val="700"/>
+              </a:spcAft>
+            </a:pPr>
+            <a:r>
+              <a:rPr sz="800" b="0">
+                <a:solidFill>
+                  <a:srgbClr val="3F5A3A"/>
+                </a:solidFill>
+                <a:latin typeface="Noto Sans KR"/>
+              </a:rPr>
+              <a:t>■   </a:t>
+            </a:r>
+            <a:r>
+              <a:rPr sz="1400" b="0">
+                <a:solidFill>
+                  <a:srgbClr val="2C362F"/>
+                </a:solidFill>
+                <a:latin typeface="Noto Sans KR"/>
+              </a:rPr>
+              <a:t>지정은 공급사뿐 아니라 그 기술을 쓰는 협력사</a:t>
+            </a:r>
+            <a:br/>
+            <a:r>
+              <a:rPr sz="1400" b="0">
+                <a:solidFill>
+                  <a:srgbClr val="2C362F"/>
+                </a:solidFill>
+                <a:latin typeface="Noto Sans KR"/>
+              </a:rPr>
+              <a:t>계약까지 영향</a:t>
+            </a:r>
+          </a:p>
+          <a:p>
+            <a:pPr marL="165100" indent="-165100">
+              <a:lnSpc>
+                <a:spcPct val="140000"/>
+              </a:lnSpc>
+              <a:spcAft>
+                <a:spcPts val="700"/>
+              </a:spcAft>
+            </a:pPr>
+            <a:r>
+              <a:rPr sz="800" b="0">
+                <a:solidFill>
+                  <a:srgbClr val="3F5A3A"/>
+                </a:solidFill>
+                <a:latin typeface="Noto Sans KR"/>
+              </a:rPr>
+              <a:t>■   </a:t>
+            </a:r>
+            <a:r>
+              <a:rPr sz="1400" b="0">
+                <a:solidFill>
+                  <a:srgbClr val="2C362F"/>
+                </a:solidFill>
+                <a:latin typeface="Noto Sans KR"/>
+              </a:rPr>
+              <a:t>온디바이스·자체 모델처럼 통제권을 가진 구성의</a:t>
+            </a:r>
+            <a:br/>
+            <a:r>
+              <a:rPr sz="1400" b="0">
+                <a:solidFill>
+                  <a:srgbClr val="2C362F"/>
+                </a:solidFill>
+                <a:latin typeface="Noto Sans KR"/>
+              </a:rPr>
+              <a:t>가치가 커짐 (추정)</a:t>
+            </a:r>
+          </a:p>
+          <a:p>
+            <a:pPr marL="165100" indent="-165100">
+              <a:lnSpc>
+                <a:spcPct val="140000"/>
+              </a:lnSpc>
+              <a:spcAft>
+                <a:spcPts val="700"/>
+              </a:spcAft>
+            </a:pPr>
+            <a:r>
+              <a:rPr sz="800" b="0">
+                <a:solidFill>
+                  <a:srgbClr val="3F5A3A"/>
+                </a:solidFill>
+                <a:latin typeface="Noto Sans KR"/>
+              </a:rPr>
+              <a:t>■   </a:t>
+            </a:r>
+            <a:r>
+              <a:rPr sz="1400" b="0">
+                <a:solidFill>
+                  <a:srgbClr val="2C362F"/>
+                </a:solidFill>
+                <a:latin typeface="Noto Sans KR"/>
+              </a:rPr>
+              <a:t>국내 국방 사업에 직접 영향이 있는지는 기사에서</a:t>
+            </a:r>
+            <a:br/>
+            <a:r>
+              <a:rPr sz="1400" b="0">
+                <a:solidFill>
+                  <a:srgbClr val="2C362F"/>
+                </a:solidFill>
+                <a:latin typeface="Noto Sans KR"/>
+              </a:rPr>
+              <a:t>확인되지 않음</a:t>
+            </a:r>
+          </a:p>
+        </p:txBody>
+      </p:sp>
+      <p:sp>
+        <p:nvSpPr>
+          <p:cNvPr id="8" name="Rounded Rectangle 7"/>
+          <p:cNvSpPr/>
+          <p:nvPr/>
+        </p:nvSpPr>
+        <p:spPr>
+          <a:xfrm>
+            <a:off x="5181599" y="1270000"/>
+            <a:ext cx="6527800" cy="4800600"/>
+          </a:xfrm>
+          <a:prstGeom prst="roundRect">
+            <a:avLst>
+              <a:gd name="adj" fmla="val 1587"/>
+            </a:avLst>
+          </a:prstGeom>
+          <a:solidFill>
+            <a:srgbClr val="DCE5D6"/>
+          </a:solidFill>
+          <a:ln>
+            <a:noFill/>
+          </a:ln>
+          <a:effectLst/>
+        </p:spPr>
+        <p:style>
+          <a:lnRef idx="1">
+            <a:schemeClr val="accent1"/>
+          </a:lnRef>
+          <a:fillRef idx="3">
+            <a:schemeClr val="accent1"/>
+          </a:fillRef>
+          <a:effectRef idx="2">
+            <a:schemeClr val="accent1"/>
+          </a:effectRef>
+          <a:fontRef idx="minor">
+            <a:schemeClr val="lt1"/>
+          </a:fontRef>
+        </p:style>
+        <p:txBody>
+          <a:bodyPr rtlCol="0" anchor="ctr"/>
+          <a:lstStyle/>
+          <a:p>
+            <a:pPr algn="ctr"/>
+          </a:p>
+        </p:txBody>
+      </p:sp>
+      <p:sp>
+        <p:nvSpPr>
+          <p:cNvPr id="9" name="TextBox 8"/>
+          <p:cNvSpPr txBox="1"/>
+          <p:nvPr/>
+        </p:nvSpPr>
+        <p:spPr>
+          <a:xfrm>
+            <a:off x="5435599" y="1523999"/>
+            <a:ext cx="6019800" cy="317500"/>
+          </a:xfrm>
+          <a:prstGeom prst="rect">
+            <a:avLst/>
+          </a:prstGeom>
+          <a:noFill/>
+        </p:spPr>
+        <p:txBody>
+          <a:bodyPr wrap="square" lIns="0" rIns="0" tIns="0" bIns="0">
+            <a:spAutoFit/>
+          </a:bodyPr>
+          <a:lstStyle/>
+          <a:p>
             <a:pPr>
               <a:lnSpc>
-                <a:spcPct val="140000"/>
-              </a:lnSpc>
-              <a:spcAft>
-                <a:spcPts val="700"/>
-              </a:spcAft>
-            </a:pPr>
-            <a:r>
-              <a:rPr sz="800" b="0">
+                <a:spcPct val="130000"/>
+              </a:lnSpc>
+              <a:spcAft>
+                <a:spcPts val="0"/>
+              </a:spcAft>
+            </a:pPr>
+            <a:r>
+              <a:rPr sz="1500" b="1">
                 <a:solidFill>
                   <a:srgbClr val="3F5A3A"/>
                 </a:solidFill>
                 <a:latin typeface="Noto Sans KR"/>
               </a:rPr>
-              <a:t>■   </a:t>
-            </a:r>
-            <a:r>
-              <a:rPr sz="1400" b="0">
-                <a:solidFill>
-                  <a:srgbClr val="2C362F"/>
-                </a:solidFill>
-                <a:latin typeface="Noto Sans KR"/>
-              </a:rPr>
-              <a:t>국방 과제에 외부 상용 AI 모델을 쓰면 공급사 정책·지정이 곧 사업 위험</a:t>
-            </a:r>
-          </a:p>
+              <a:t>이미지 생성 대기</a:t>
+            </a:r>
+          </a:p>
+        </p:txBody>
+      </p:sp>
+      <p:sp>
+        <p:nvSpPr>
+          <p:cNvPr id="10" name="TextBox 9"/>
+          <p:cNvSpPr txBox="1"/>
+          <p:nvPr/>
+        </p:nvSpPr>
+        <p:spPr>
+          <a:xfrm>
+            <a:off x="5435599" y="1904999"/>
+            <a:ext cx="6019800" cy="3848099"/>
+          </a:xfrm>
+          <a:prstGeom prst="rect">
+            <a:avLst/>
+          </a:prstGeom>
+          <a:noFill/>
+        </p:spPr>
+        <p:txBody>
+          <a:bodyPr wrap="square" lIns="0" rIns="0" tIns="0" bIns="0">
+            <a:spAutoFit/>
+          </a:bodyPr>
+          <a:lstStyle/>
           <a:p>
             <a:pPr>
               <a:lnSpc>
-                <a:spcPct val="140000"/>
-              </a:lnSpc>
-              <a:spcAft>
-                <a:spcPts val="700"/>
-              </a:spcAft>
-            </a:pPr>
-            <a:r>
-              <a:rPr sz="800" b="0">
-                <a:solidFill>
-                  <a:srgbClr val="3F5A3A"/>
-                </a:solidFill>
-                <a:latin typeface="Noto Sans KR"/>
-              </a:rPr>
-              <a:t>■   </a:t>
-            </a:r>
-            <a:r>
-              <a:rPr sz="1400" b="0">
-                <a:solidFill>
-                  <a:srgbClr val="2C362F"/>
-                </a:solidFill>
-                <a:latin typeface="Noto Sans KR"/>
-              </a:rPr>
-              <a:t>지정은 공급사뿐 아니라 그 기술을 쓰는 협력사 계약까지 영향</a:t>
-            </a:r>
-          </a:p>
+                <a:spcPct val="130000"/>
+              </a:lnSpc>
+              <a:spcAft>
+                <a:spcPts val="0"/>
+              </a:spcAft>
+            </a:pPr>
+            <a:r>
+              <a:rPr sz="1000" b="0">
+                <a:solidFill>
+                  <a:srgbClr val="5C685F"/>
+                </a:solidFill>
+                <a:latin typeface="Noto Sans KR"/>
+              </a:rPr>
+              <a:t>국방 현장에서 외부 클라우드 AI 모델과 장비 안에서 도는 온디바이스 AI를 나란히 비교하는 개념도. 흰</a:t>
+            </a:r>
+            <a:br/>
+            <a:r>
+              <a:rPr sz="1000" b="0">
+                <a:solidFill>
+                  <a:srgbClr val="5C685F"/>
+                </a:solidFill>
+                <a:latin typeface="Noto Sans KR"/>
+              </a:rPr>
+              <a:t>바탕, 올리브 녹색 강조, 사람 얼굴 없이 단순한 도형 위주.</a:t>
+            </a:r>
+          </a:p>
+        </p:txBody>
+      </p:sp>
+      <p:sp>
+        <p:nvSpPr>
+          <p:cNvPr id="11" name="TextBox 10"/>
+          <p:cNvSpPr txBox="1"/>
+          <p:nvPr/>
+        </p:nvSpPr>
+        <p:spPr>
+          <a:xfrm>
+            <a:off x="5181599" y="6134100"/>
+            <a:ext cx="6527800" cy="215900"/>
+          </a:xfrm>
+          <a:prstGeom prst="rect">
+            <a:avLst/>
+          </a:prstGeom>
+          <a:noFill/>
+        </p:spPr>
+        <p:txBody>
+          <a:bodyPr wrap="square" lIns="0" rIns="0" tIns="0" bIns="0">
+            <a:spAutoFit/>
+          </a:bodyPr>
+          <a:lstStyle/>
           <a:p>
             <a:pPr>
               <a:lnSpc>
-                <a:spcPct val="140000"/>
-              </a:lnSpc>
-              <a:spcAft>
-                <a:spcPts val="700"/>
-              </a:spcAft>
-            </a:pPr>
-            <a:r>
-              <a:rPr sz="800" b="0">
-                <a:solidFill>
-                  <a:srgbClr val="3F5A3A"/>
-                </a:solidFill>
-                <a:latin typeface="Noto Sans KR"/>
-              </a:rPr>
-              <a:t>■   </a:t>
-            </a:r>
-            <a:r>
-              <a:rPr sz="1400" b="0">
-                <a:solidFill>
-                  <a:srgbClr val="2C362F"/>
-                </a:solidFill>
-                <a:latin typeface="Noto Sans KR"/>
-              </a:rPr>
-              <a:t>온디바이스·자체 모델처럼 통제권을 가진 구성의 가치가 커짐 (추정)</a:t>
-            </a:r>
-          </a:p>
-          <a:p>
-            <a:pPr>
-              <a:lnSpc>
-                <a:spcPct val="140000"/>
-              </a:lnSpc>
-              <a:spcAft>
-                <a:spcPts val="700"/>
-              </a:spcAft>
-            </a:pPr>
-            <a:r>
-              <a:rPr sz="800" b="0">
-                <a:solidFill>
-                  <a:srgbClr val="3F5A3A"/>
-                </a:solidFill>
-                <a:latin typeface="Noto Sans KR"/>
-              </a:rPr>
-              <a:t>■   </a:t>
-            </a:r>
-            <a:r>
-              <a:rPr sz="1400" b="0">
-                <a:solidFill>
-                  <a:srgbClr val="2C362F"/>
-                </a:solidFill>
-                <a:latin typeface="Noto Sans KR"/>
-              </a:rPr>
-              <a:t>국내 국방 사업에 직접 영향이 있는지는 기사에서 확인되지 않음</a:t>
+                <a:spcPct val="130000"/>
+              </a:lnSpc>
+              <a:spcAft>
+                <a:spcPts val="0"/>
+              </a:spcAft>
+            </a:pPr>
+            <a:r>
+              <a:rPr sz="850" b="0">
+                <a:solidFill>
+                  <a:srgbClr val="5C685F"/>
+                </a:solidFill>
+                <a:latin typeface="Noto Sans KR"/>
+              </a:rPr>
+              <a:t>개념 이미지 (AI 생성) · 본 그림은 외부 AI 모델 의존과 자체 모델 운용을 비교하는 개념도입니다</a:t>
             </a:r>
           </a:p>
         </p:txBody>
@@ -6524,7 +7102,7 @@
           </a:bodyPr>
           <a:lstStyle/>
           <a:p>
-            <a:pPr>
+            <a:pPr marL="165100" indent="-165100">
               <a:lnSpc>
                 <a:spcPct val="140000"/>
               </a:lnSpc>
@@ -6552,7 +7130,7 @@
             </a:r>
           </a:p>
           <a:p>
-            <a:pPr>
+            <a:pPr marL="165100" indent="-165100">
               <a:lnSpc>
                 <a:spcPct val="140000"/>
               </a:lnSpc>
@@ -6580,7 +7158,7 @@
             </a:r>
           </a:p>
           <a:p>
-            <a:pPr>
+            <a:pPr marL="165100" indent="-165100">
               <a:lnSpc>
                 <a:spcPct val="140000"/>
               </a:lnSpc>
@@ -6608,7 +7186,7 @@
             </a:r>
           </a:p>
           <a:p>
-            <a:pPr>
+            <a:pPr marL="165100" indent="-165100">
               <a:lnSpc>
                 <a:spcPct val="140000"/>
               </a:lnSpc>
@@ -7083,7 +7661,7 @@
           </a:bodyPr>
           <a:lstStyle/>
           <a:p>
-            <a:pPr>
+            <a:pPr marL="165100" indent="-165100">
               <a:lnSpc>
                 <a:spcPct val="140000"/>
               </a:lnSpc>
@@ -7111,7 +7689,7 @@
             </a:r>
           </a:p>
           <a:p>
-            <a:pPr>
+            <a:pPr marL="165100" indent="-165100">
               <a:lnSpc>
                 <a:spcPct val="140000"/>
               </a:lnSpc>
@@ -7139,7 +7717,7 @@
             </a:r>
           </a:p>
           <a:p>
-            <a:pPr>
+            <a:pPr marL="165100" indent="-165100">
               <a:lnSpc>
                 <a:spcPct val="140000"/>
               </a:lnSpc>
@@ -7276,7 +7854,7 @@
           </a:bodyPr>
           <a:lstStyle/>
           <a:p>
-            <a:pPr>
+            <a:pPr marL="165100" indent="-165100">
               <a:lnSpc>
                 <a:spcPct val="140000"/>
               </a:lnSpc>
@@ -7304,7 +7882,7 @@
             </a:r>
           </a:p>
           <a:p>
-            <a:pPr>
+            <a:pPr marL="165100" indent="-165100">
               <a:lnSpc>
                 <a:spcPct val="140000"/>
               </a:lnSpc>
@@ -7332,7 +7910,7 @@
             </a:r>
           </a:p>
           <a:p>
-            <a:pPr>
+            <a:pPr marL="165100" indent="-165100">
               <a:lnSpc>
                 <a:spcPct val="140000"/>
               </a:lnSpc>

--- a/EXP-1014-01/EXP-1014-01_앤트로픽-vs-미-국방부-공급망-위험-지정-재심-청구.pptx
+++ b/EXP-1014-01/EXP-1014-01_앤트로픽-vs-미-국방부-공급망-위험-지정-재심-청구.pptx
@@ -6668,149 +6668,34 @@
           </a:p>
         </p:txBody>
       </p:sp>
-      <p:sp>
-        <p:nvSpPr>
-          <p:cNvPr id="8" name="Rounded Rectangle 7"/>
-          <p:cNvSpPr/>
-          <p:nvPr/>
-        </p:nvSpPr>
+      <p:pic>
+        <p:nvPicPr>
+          <p:cNvPr id="8" name="Picture 7" descr="7.png"/>
+          <p:cNvPicPr>
+            <a:picLocks noChangeAspect="1"/>
+          </p:cNvPicPr>
+          <p:nvPr/>
+        </p:nvPicPr>
+        <p:blipFill>
+          <a:blip r:embed="rId2"/>
+          <a:srcRect l="11736" r="11736"/>
+          <a:stretch>
+            <a:fillRect/>
+          </a:stretch>
+        </p:blipFill>
         <p:spPr>
           <a:xfrm>
             <a:off x="5181599" y="1270000"/>
             <a:ext cx="6527800" cy="4800600"/>
           </a:xfrm>
-          <a:prstGeom prst="roundRect">
-            <a:avLst>
-              <a:gd name="adj" fmla="val 1587"/>
-            </a:avLst>
-          </a:prstGeom>
-          <a:solidFill>
-            <a:srgbClr val="DCE5D6"/>
-          </a:solidFill>
-          <a:ln>
-            <a:noFill/>
-          </a:ln>
-          <a:effectLst/>
-        </p:spPr>
-        <p:style>
-          <a:lnRef idx="1">
-            <a:schemeClr val="accent1"/>
-          </a:lnRef>
-          <a:fillRef idx="3">
-            <a:schemeClr val="accent1"/>
-          </a:fillRef>
-          <a:effectRef idx="2">
-            <a:schemeClr val="accent1"/>
-          </a:effectRef>
-          <a:fontRef idx="minor">
-            <a:schemeClr val="lt1"/>
-          </a:fontRef>
-        </p:style>
-        <p:txBody>
-          <a:bodyPr rtlCol="0" anchor="ctr"/>
-          <a:lstStyle/>
-          <a:p>
-            <a:pPr algn="ctr"/>
-          </a:p>
-        </p:txBody>
-      </p:sp>
+          <a:prstGeom prst="rect">
+            <a:avLst/>
+          </a:prstGeom>
+        </p:spPr>
+      </p:pic>
       <p:sp>
         <p:nvSpPr>
           <p:cNvPr id="9" name="TextBox 8"/>
-          <p:cNvSpPr txBox="1"/>
-          <p:nvPr/>
-        </p:nvSpPr>
-        <p:spPr>
-          <a:xfrm>
-            <a:off x="5435599" y="1523999"/>
-            <a:ext cx="6019800" cy="317500"/>
-          </a:xfrm>
-          <a:prstGeom prst="rect">
-            <a:avLst/>
-          </a:prstGeom>
-          <a:noFill/>
-        </p:spPr>
-        <p:txBody>
-          <a:bodyPr wrap="square" lIns="0" rIns="0" tIns="0" bIns="0">
-            <a:spAutoFit/>
-          </a:bodyPr>
-          <a:lstStyle/>
-          <a:p>
-            <a:pPr>
-              <a:lnSpc>
-                <a:spcPct val="130000"/>
-              </a:lnSpc>
-              <a:spcAft>
-                <a:spcPts val="0"/>
-              </a:spcAft>
-            </a:pPr>
-            <a:r>
-              <a:rPr sz="1500" b="1">
-                <a:solidFill>
-                  <a:srgbClr val="3F5A3A"/>
-                </a:solidFill>
-                <a:latin typeface="Noto Sans KR"/>
-              </a:rPr>
-              <a:t>이미지 생성 대기</a:t>
-            </a:r>
-          </a:p>
-        </p:txBody>
-      </p:sp>
-      <p:sp>
-        <p:nvSpPr>
-          <p:cNvPr id="10" name="TextBox 9"/>
-          <p:cNvSpPr txBox="1"/>
-          <p:nvPr/>
-        </p:nvSpPr>
-        <p:spPr>
-          <a:xfrm>
-            <a:off x="5435599" y="1904999"/>
-            <a:ext cx="6019800" cy="3848099"/>
-          </a:xfrm>
-          <a:prstGeom prst="rect">
-            <a:avLst/>
-          </a:prstGeom>
-          <a:noFill/>
-        </p:spPr>
-        <p:txBody>
-          <a:bodyPr wrap="square" lIns="0" rIns="0" tIns="0" bIns="0">
-            <a:spAutoFit/>
-          </a:bodyPr>
-          <a:lstStyle/>
-          <a:p>
-            <a:pPr>
-              <a:lnSpc>
-                <a:spcPct val="130000"/>
-              </a:lnSpc>
-              <a:spcAft>
-                <a:spcPts val="0"/>
-              </a:spcAft>
-            </a:pPr>
-            <a:r>
-              <a:rPr sz="1000" b="0">
-                <a:solidFill>
-                  <a:srgbClr val="5C685F"/>
-                </a:solidFill>
-                <a:latin typeface="Noto Sans KR"/>
-              </a:rPr>
-              <a:t>국방 현장에서 외부 클라우드 AI 모델과 장비 안에서 도는 온디바이스 AI를 나란히 비교하는 개념도. 흰</a:t>
-            </a:r>
-            <a:br/>
-            <a:r>
-              <a:rPr sz="1000" b="0">
-                <a:solidFill>
-                  <a:srgbClr val="5C685F"/>
-                </a:solidFill>
-                <a:latin typeface="Noto Sans KR"/>
-              </a:rPr>
-              <a:t>바탕, 올리브 녹색 강조, 사람 얼굴 없이 단순한 도형 위주.</a:t>
-            </a:r>
-          </a:p>
-        </p:txBody>
-      </p:sp>
-      <p:sp>
-        <p:nvSpPr>
-          <p:cNvPr id="11" name="TextBox 10"/>
           <p:cNvSpPr txBox="1"/>
           <p:nvPr/>
         </p:nvSpPr>
